--- a/基于智能体集群的HDFS自动运维系统.pptx
+++ b/基于智能体集群的HDFS自动运维系统.pptx
@@ -359,7 +359,7 @@
           <a:p>
             <a:fld id="{B7268E1E-0E44-426D-905E-8AD9B19D2182}" type="datetimeFigureOut">
               <a:rPr lang="cs-CZ" smtClean="0"/>
-              <a:t>06.06.2026</a:t>
+              <a:t>07.06.2026</a:t>
             </a:fld>
             <a:endParaRPr lang="cs-CZ"/>
           </a:p>
@@ -1414,8 +1414,8 @@
         </p:nvSpPr>
         <p:spPr>
           <a:xfrm>
-            <a:off x="2857500" y="512763"/>
-            <a:ext cx="3429000" cy="2566987"/>
+            <a:off x="2290763" y="512763"/>
+            <a:ext cx="4562475" cy="2566987"/>
           </a:xfrm>
           <a:prstGeom prst="rect">
             <a:avLst/>
@@ -1645,8 +1645,8 @@
         </p:nvSpPr>
         <p:spPr>
           <a:xfrm>
-            <a:off x="2857500" y="512763"/>
-            <a:ext cx="3429000" cy="2566987"/>
+            <a:off x="2290763" y="512763"/>
+            <a:ext cx="4562475" cy="2566987"/>
           </a:xfrm>
           <a:prstGeom prst="rect">
             <a:avLst/>
@@ -1876,8 +1876,8 @@
         </p:nvSpPr>
         <p:spPr>
           <a:xfrm>
-            <a:off x="2857500" y="512763"/>
-            <a:ext cx="3429000" cy="2566987"/>
+            <a:off x="2290763" y="512763"/>
+            <a:ext cx="4562475" cy="2566987"/>
           </a:xfrm>
           <a:prstGeom prst="rect">
             <a:avLst/>
@@ -18585,7 +18585,7 @@
               <a:defRPr/>
             </a:pPr>
             <a:r>
-              <a:rPr lang="en-US" sz="2800" b="1" i="0" u="none" strike="noStrike">
+              <a:rPr lang="en-US" sz="2800" b="1" i="0" u="none" strike="noStrike" dirty="0">
                 <a:solidFill>
                   <a:srgbClr val="0099FF"/>
                 </a:solidFill>
@@ -18594,9 +18594,9 @@
                 <a:cs typeface="Noto Sans SC"/>
                 <a:sym typeface="Noto Sans SC"/>
               </a:rPr>
-              <a:t>1,234,567</a:t>
+              <a:t>1,015,500</a:t>
             </a:r>
-            <a:endParaRPr lang="en-US" sz="1100"/>
+            <a:endParaRPr lang="en-US" sz="1100" dirty="0"/>
           </a:p>
         </p:txBody>
       </p:sp>
@@ -18755,7 +18755,7 @@
               <a:defRPr/>
             </a:pPr>
             <a:r>
-              <a:rPr lang="en-US" sz="2800" b="1" i="0" u="none" strike="noStrike">
+              <a:rPr lang="en-US" sz="2800" b="1" i="0" u="none" strike="noStrike" dirty="0">
                 <a:solidFill>
                   <a:srgbClr val="FF4D4F"/>
                 </a:solidFill>
@@ -18764,9 +18764,9 @@
                 <a:cs typeface="Noto Sans SC"/>
                 <a:sym typeface="Noto Sans SC"/>
               </a:rPr>
-              <a:t>128</a:t>
+              <a:t>21424</a:t>
             </a:r>
-            <a:endParaRPr lang="en-US" sz="1100"/>
+            <a:endParaRPr lang="en-US" sz="1100" dirty="0"/>
           </a:p>
         </p:txBody>
       </p:sp>
@@ -18925,7 +18925,7 @@
               <a:defRPr/>
             </a:pPr>
             <a:r>
-              <a:rPr lang="en-US" sz="2800" b="1" i="0" u="none" strike="noStrike">
+              <a:rPr lang="en-US" sz="2800" b="1" dirty="0">
                 <a:solidFill>
                   <a:srgbClr val="52C41A"/>
                 </a:solidFill>
@@ -18934,1012 +18934,24 @@
                 <a:cs typeface="Noto Sans SC"/>
                 <a:sym typeface="Noto Sans SC"/>
               </a:rPr>
-              <a:t>99.99%</a:t>
+              <a:t>76</a:t>
             </a:r>
-            <a:endParaRPr lang="en-US" sz="1100"/>
-          </a:p>
-        </p:txBody>
-      </p:sp>
-      <p:pic>
-        <p:nvPicPr>
-          <p:cNvPr id="16" name="Picture 16"/>
-          <p:cNvPicPr>
-            <a:picLocks noChangeAspect="1"/>
-          </p:cNvPicPr>
-          <p:nvPr/>
-        </p:nvPicPr>
-        <p:blipFill>
-          <a:blip r:embed="rId4"/>
-          <a:stretch>
-            <a:fillRect/>
-          </a:stretch>
-        </p:blipFill>
-        <p:spPr>
-          <a:xfrm>
-            <a:off x="762000" y="3556000"/>
-            <a:ext cx="5334000" cy="2413000"/>
-          </a:xfrm>
-          <a:prstGeom prst="rect">
-            <a:avLst/>
-          </a:prstGeom>
-          <a:ln w="12700">
-            <a:noFill/>
-            <a:prstDash val="solid"/>
-          </a:ln>
-        </p:spPr>
-      </p:pic>
-      <p:graphicFrame>
-        <p:nvGraphicFramePr>
-          <p:cNvPr id="17" name="Table 17"/>
-          <p:cNvGraphicFramePr>
-            <a:graphicFrameLocks noGrp="1"/>
-          </p:cNvGraphicFramePr>
-          <p:nvPr/>
-        </p:nvGraphicFramePr>
-        <p:xfrm>
-          <a:off x="6477000" y="3556000"/>
-          <a:ext cx="4826000" cy="2222500"/>
-        </p:xfrm>
-        <a:graphic>
-          <a:graphicData uri="http://schemas.openxmlformats.org/drawingml/2006/table">
-            <a:tbl>
-              <a:tblPr>
-                <a:effectLst/>
-              </a:tblPr>
-              <a:tblGrid>
-                <a:gridCol w="1143000">
-                  <a:extLst>
-                    <a:ext uri="{9D8B030D-6E8A-4147-A177-3AD203B41FA5}">
-                      <a16:colId xmlns:a16="http://schemas.microsoft.com/office/drawing/2014/main" val="20000"/>
-                    </a:ext>
-                  </a:extLst>
-                </a:gridCol>
-                <a:gridCol w="1206500">
-                  <a:extLst>
-                    <a:ext uri="{9D8B030D-6E8A-4147-A177-3AD203B41FA5}">
-                      <a16:colId xmlns:a16="http://schemas.microsoft.com/office/drawing/2014/main" val="20001"/>
-                    </a:ext>
-                  </a:extLst>
-                </a:gridCol>
-                <a:gridCol w="1270000">
-                  <a:extLst>
-                    <a:ext uri="{9D8B030D-6E8A-4147-A177-3AD203B41FA5}">
-                      <a16:colId xmlns:a16="http://schemas.microsoft.com/office/drawing/2014/main" val="20002"/>
-                    </a:ext>
-                  </a:extLst>
-                </a:gridCol>
-                <a:gridCol w="1206500">
-                  <a:extLst>
-                    <a:ext uri="{9D8B030D-6E8A-4147-A177-3AD203B41FA5}">
-                      <a16:colId xmlns:a16="http://schemas.microsoft.com/office/drawing/2014/main" val="20003"/>
-                    </a:ext>
-                  </a:extLst>
-                </a:gridCol>
-              </a:tblGrid>
-              <a:tr h="508000">
-                <a:tc>
-                  <a:txBody>
-                    <a:bodyPr/>
-                    <a:lstStyle/>
-                    <a:p>
-                      <a:pPr marL="0" indent="0" algn="ctr">
-                        <a:lnSpc>
-                          <a:spcPct val="100000"/>
-                        </a:lnSpc>
-                        <a:defRPr/>
-                      </a:pPr>
-                      <a:r>
-                        <a:rPr lang="en-US" sz="1300" b="1" i="0" u="none" strike="noStrike">
-                          <a:solidFill>
-                            <a:srgbClr val="FFFFFF"/>
-                          </a:solidFill>
-                          <a:latin typeface="Noto Sans SC"/>
-                          <a:ea typeface="Noto Sans SC"/>
-                          <a:cs typeface="Noto Sans SC"/>
-                          <a:sym typeface="Noto Sans SC"/>
-                        </a:rPr>
-                        <a:t>发生时间</a:t>
-                      </a:r>
-                      <a:endParaRPr lang="en-US" sz="1100"/>
-                    </a:p>
-                  </a:txBody>
-                  <a:tcPr marL="101600" marR="101600" marT="101600" marB="101600" anchor="ctr">
-                    <a:lnL>
-                      <a:noFill/>
-                    </a:lnL>
-                    <a:lnR>
-                      <a:noFill/>
-                    </a:lnR>
-                    <a:lnT>
-                      <a:noFill/>
-                    </a:lnT>
-                    <a:lnB w="12700" cap="flat" cmpd="sng" algn="ctr">
-                      <a:solidFill>
-                        <a:srgbClr val="0066CC"/>
-                      </a:solidFill>
-                      <a:prstDash val="solid"/>
-                      <a:round/>
-                      <a:headEnd type="none" w="med" len="med"/>
-                      <a:tailEnd type="none" w="med" len="med"/>
-                    </a:lnB>
-                    <a:solidFill>
-                      <a:srgbClr val="0066CC">
-                        <a:alpha val="40000"/>
-                      </a:srgbClr>
-                    </a:solidFill>
-                  </a:tcPr>
-                </a:tc>
-                <a:tc>
-                  <a:txBody>
-                    <a:bodyPr/>
-                    <a:lstStyle/>
-                    <a:p>
-                      <a:pPr marL="0" indent="0" algn="ctr">
-                        <a:lnSpc>
-                          <a:spcPct val="100000"/>
-                        </a:lnSpc>
-                        <a:defRPr/>
-                      </a:pPr>
-                      <a:r>
-                        <a:rPr lang="en-US" sz="1300" b="1" i="0" u="none" strike="noStrike">
-                          <a:solidFill>
-                            <a:srgbClr val="FFFFFF"/>
-                          </a:solidFill>
-                          <a:latin typeface="Noto Sans SC"/>
-                          <a:ea typeface="Noto Sans SC"/>
-                          <a:cs typeface="Noto Sans SC"/>
-                          <a:sym typeface="Noto Sans SC"/>
-                        </a:rPr>
-                        <a:t>Block ID</a:t>
-                      </a:r>
-                      <a:endParaRPr lang="en-US" sz="1100"/>
-                    </a:p>
-                  </a:txBody>
-                  <a:tcPr marL="101600" marR="101600" marT="101600" marB="101600" anchor="ctr">
-                    <a:lnL>
-                      <a:noFill/>
-                    </a:lnL>
-                    <a:lnR>
-                      <a:noFill/>
-                    </a:lnR>
-                    <a:lnT>
-                      <a:noFill/>
-                    </a:lnT>
-                    <a:lnB w="12700" cap="flat" cmpd="sng" algn="ctr">
-                      <a:solidFill>
-                        <a:srgbClr val="0066CC"/>
-                      </a:solidFill>
-                      <a:prstDash val="solid"/>
-                      <a:round/>
-                      <a:headEnd type="none" w="med" len="med"/>
-                      <a:tailEnd type="none" w="med" len="med"/>
-                    </a:lnB>
-                    <a:solidFill>
-                      <a:srgbClr val="0066CC">
-                        <a:alpha val="40000"/>
-                      </a:srgbClr>
-                    </a:solidFill>
-                  </a:tcPr>
-                </a:tc>
-                <a:tc>
-                  <a:txBody>
-                    <a:bodyPr/>
-                    <a:lstStyle/>
-                    <a:p>
-                      <a:pPr marL="0" indent="0" algn="ctr">
-                        <a:lnSpc>
-                          <a:spcPct val="100000"/>
-                        </a:lnSpc>
-                        <a:defRPr/>
-                      </a:pPr>
-                      <a:r>
-                        <a:rPr lang="en-US" sz="1300" b="1" i="0" u="none" strike="noStrike">
-                          <a:solidFill>
-                            <a:srgbClr val="FFFFFF"/>
-                          </a:solidFill>
-                          <a:latin typeface="Noto Sans SC"/>
-                          <a:ea typeface="Noto Sans SC"/>
-                          <a:cs typeface="Noto Sans SC"/>
-                          <a:sym typeface="Noto Sans SC"/>
-                        </a:rPr>
-                        <a:t>异常类型</a:t>
-                      </a:r>
-                      <a:endParaRPr lang="en-US" sz="1100"/>
-                    </a:p>
-                  </a:txBody>
-                  <a:tcPr marL="101600" marR="101600" marT="101600" marB="101600" anchor="ctr">
-                    <a:lnL>
-                      <a:noFill/>
-                    </a:lnL>
-                    <a:lnR>
-                      <a:noFill/>
-                    </a:lnR>
-                    <a:lnT>
-                      <a:noFill/>
-                    </a:lnT>
-                    <a:lnB w="12700" cap="flat" cmpd="sng" algn="ctr">
-                      <a:solidFill>
-                        <a:srgbClr val="0066CC"/>
-                      </a:solidFill>
-                      <a:prstDash val="solid"/>
-                      <a:round/>
-                      <a:headEnd type="none" w="med" len="med"/>
-                      <a:tailEnd type="none" w="med" len="med"/>
-                    </a:lnB>
-                    <a:solidFill>
-                      <a:srgbClr val="0066CC">
-                        <a:alpha val="40000"/>
-                      </a:srgbClr>
-                    </a:solidFill>
-                  </a:tcPr>
-                </a:tc>
-                <a:tc>
-                  <a:txBody>
-                    <a:bodyPr/>
-                    <a:lstStyle/>
-                    <a:p>
-                      <a:pPr marL="0" indent="0" algn="ctr">
-                        <a:lnSpc>
-                          <a:spcPct val="100000"/>
-                        </a:lnSpc>
-                        <a:defRPr/>
-                      </a:pPr>
-                      <a:r>
-                        <a:rPr lang="en-US" sz="1300" b="1" i="0" u="none" strike="noStrike">
-                          <a:solidFill>
-                            <a:srgbClr val="FFFFFF"/>
-                          </a:solidFill>
-                          <a:latin typeface="Noto Sans SC"/>
-                          <a:ea typeface="Noto Sans SC"/>
-                          <a:cs typeface="Noto Sans SC"/>
-                          <a:sym typeface="Noto Sans SC"/>
-                        </a:rPr>
-                        <a:t>当前状态</a:t>
-                      </a:r>
-                      <a:endParaRPr lang="en-US" sz="1100"/>
-                    </a:p>
-                  </a:txBody>
-                  <a:tcPr marL="101600" marR="101600" marT="101600" marB="101600" anchor="ctr">
-                    <a:lnL>
-                      <a:noFill/>
-                    </a:lnL>
-                    <a:lnR>
-                      <a:noFill/>
-                    </a:lnR>
-                    <a:lnT>
-                      <a:noFill/>
-                    </a:lnT>
-                    <a:lnB w="12700" cap="flat" cmpd="sng" algn="ctr">
-                      <a:solidFill>
-                        <a:srgbClr val="0066CC"/>
-                      </a:solidFill>
-                      <a:prstDash val="solid"/>
-                      <a:round/>
-                      <a:headEnd type="none" w="med" len="med"/>
-                      <a:tailEnd type="none" w="med" len="med"/>
-                    </a:lnB>
-                    <a:solidFill>
-                      <a:srgbClr val="0066CC">
-                        <a:alpha val="40000"/>
-                      </a:srgbClr>
-                    </a:solidFill>
-                  </a:tcPr>
-                </a:tc>
-                <a:extLst>
-                  <a:ext uri="{0D108BD9-81ED-4DB2-BD59-A6C34878D82A}">
-                    <a16:rowId xmlns:a16="http://schemas.microsoft.com/office/drawing/2014/main" val="10000"/>
-                  </a:ext>
-                </a:extLst>
-              </a:tr>
-              <a:tr h="571500">
-                <a:tc>
-                  <a:txBody>
-                    <a:bodyPr/>
-                    <a:lstStyle/>
-                    <a:p>
-                      <a:pPr marL="0" indent="0" algn="ctr">
-                        <a:lnSpc>
-                          <a:spcPct val="100000"/>
-                        </a:lnSpc>
-                        <a:defRPr/>
-                      </a:pPr>
-                      <a:r>
-                        <a:rPr lang="en-US" sz="1200" b="0" i="0" u="none" strike="noStrike">
-                          <a:solidFill>
-                            <a:srgbClr val="FFFFFF">
-                              <a:alpha val="85098"/>
-                            </a:srgbClr>
-                          </a:solidFill>
-                          <a:latin typeface="Noto Sans SC"/>
-                          <a:ea typeface="Noto Sans SC"/>
-                          <a:cs typeface="Noto Sans SC"/>
-                          <a:sym typeface="Noto Sans SC"/>
-                        </a:rPr>
-                        <a:t>10:24:11</a:t>
-                      </a:r>
-                      <a:endParaRPr lang="en-US" sz="1100"/>
-                    </a:p>
-                  </a:txBody>
-                  <a:tcPr marL="101600" marR="101600" marT="101600" marB="101600" anchor="ctr">
-                    <a:lnL>
-                      <a:noFill/>
-                    </a:lnL>
-                    <a:lnR>
-                      <a:noFill/>
-                    </a:lnR>
-                    <a:lnT w="12700" cap="flat" cmpd="sng" algn="ctr">
-                      <a:solidFill>
-                        <a:srgbClr val="0066CC"/>
-                      </a:solidFill>
-                      <a:prstDash val="solid"/>
-                      <a:round/>
-                      <a:headEnd type="none" w="med" len="med"/>
-                      <a:tailEnd type="none" w="med" len="med"/>
-                    </a:lnT>
-                    <a:lnB w="12700" cap="flat" cmpd="sng" algn="ctr">
-                      <a:solidFill>
-                        <a:srgbClr val="FFFFFF"/>
-                      </a:solidFill>
-                      <a:prstDash val="solid"/>
-                      <a:round/>
-                      <a:headEnd type="none" w="med" len="med"/>
-                      <a:tailEnd type="none" w="med" len="med"/>
-                    </a:lnB>
-                    <a:solidFill>
-                      <a:srgbClr val="FFFFFF">
-                        <a:alpha val="5000"/>
-                      </a:srgbClr>
-                    </a:solidFill>
-                  </a:tcPr>
-                </a:tc>
-                <a:tc>
-                  <a:txBody>
-                    <a:bodyPr/>
-                    <a:lstStyle/>
-                    <a:p>
-                      <a:pPr marL="0" indent="0" algn="ctr">
-                        <a:lnSpc>
-                          <a:spcPct val="100000"/>
-                        </a:lnSpc>
-                        <a:defRPr/>
-                      </a:pPr>
-                      <a:r>
-                        <a:rPr lang="en-US" sz="1200" b="0" i="0" u="none" strike="noStrike">
-                          <a:solidFill>
-                            <a:srgbClr val="FFFFFF">
-                              <a:alpha val="85098"/>
-                            </a:srgbClr>
-                          </a:solidFill>
-                          <a:latin typeface="Noto Sans SC"/>
-                          <a:ea typeface="Noto Sans SC"/>
-                          <a:cs typeface="Noto Sans SC"/>
-                          <a:sym typeface="Noto Sans SC"/>
-                        </a:rPr>
-                        <a:t>B-9821-X</a:t>
-                      </a:r>
-                      <a:endParaRPr lang="en-US" sz="1100"/>
-                    </a:p>
-                  </a:txBody>
-                  <a:tcPr marL="101600" marR="101600" marT="101600" marB="101600" anchor="ctr">
-                    <a:lnL>
-                      <a:noFill/>
-                    </a:lnL>
-                    <a:lnR>
-                      <a:noFill/>
-                    </a:lnR>
-                    <a:lnT w="12700" cap="flat" cmpd="sng" algn="ctr">
-                      <a:solidFill>
-                        <a:srgbClr val="0066CC"/>
-                      </a:solidFill>
-                      <a:prstDash val="solid"/>
-                      <a:round/>
-                      <a:headEnd type="none" w="med" len="med"/>
-                      <a:tailEnd type="none" w="med" len="med"/>
-                    </a:lnT>
-                    <a:lnB w="12700" cap="flat" cmpd="sng" algn="ctr">
-                      <a:solidFill>
-                        <a:srgbClr val="FFFFFF"/>
-                      </a:solidFill>
-                      <a:prstDash val="solid"/>
-                      <a:round/>
-                      <a:headEnd type="none" w="med" len="med"/>
-                      <a:tailEnd type="none" w="med" len="med"/>
-                    </a:lnB>
-                    <a:solidFill>
-                      <a:srgbClr val="FFFFFF">
-                        <a:alpha val="5000"/>
-                      </a:srgbClr>
-                    </a:solidFill>
-                  </a:tcPr>
-                </a:tc>
-                <a:tc>
-                  <a:txBody>
-                    <a:bodyPr/>
-                    <a:lstStyle/>
-                    <a:p>
-                      <a:pPr marL="0" indent="0" algn="ctr">
-                        <a:lnSpc>
-                          <a:spcPct val="100000"/>
-                        </a:lnSpc>
-                        <a:defRPr/>
-                      </a:pPr>
-                      <a:r>
-                        <a:rPr lang="en-US" sz="1200" b="0" i="0" u="none" strike="noStrike">
-                          <a:solidFill>
-                            <a:srgbClr val="FFC107"/>
-                          </a:solidFill>
-                          <a:latin typeface="Noto Sans SC"/>
-                          <a:ea typeface="Noto Sans SC"/>
-                          <a:cs typeface="Noto Sans SC"/>
-                          <a:sym typeface="Noto Sans SC"/>
-                        </a:rPr>
-                        <a:t>连接超时</a:t>
-                      </a:r>
-                      <a:endParaRPr lang="en-US" sz="1100"/>
-                    </a:p>
-                  </a:txBody>
-                  <a:tcPr marL="101600" marR="101600" marT="101600" marB="101600" anchor="ctr">
-                    <a:lnL>
-                      <a:noFill/>
-                    </a:lnL>
-                    <a:lnR>
-                      <a:noFill/>
-                    </a:lnR>
-                    <a:lnT w="12700" cap="flat" cmpd="sng" algn="ctr">
-                      <a:solidFill>
-                        <a:srgbClr val="0066CC"/>
-                      </a:solidFill>
-                      <a:prstDash val="solid"/>
-                      <a:round/>
-                      <a:headEnd type="none" w="med" len="med"/>
-                      <a:tailEnd type="none" w="med" len="med"/>
-                    </a:lnT>
-                    <a:lnB w="12700" cap="flat" cmpd="sng" algn="ctr">
-                      <a:solidFill>
-                        <a:srgbClr val="FFFFFF"/>
-                      </a:solidFill>
-                      <a:prstDash val="solid"/>
-                      <a:round/>
-                      <a:headEnd type="none" w="med" len="med"/>
-                      <a:tailEnd type="none" w="med" len="med"/>
-                    </a:lnB>
-                    <a:solidFill>
-                      <a:srgbClr val="FFFFFF">
-                        <a:alpha val="5000"/>
-                      </a:srgbClr>
-                    </a:solidFill>
-                  </a:tcPr>
-                </a:tc>
-                <a:tc>
-                  <a:txBody>
-                    <a:bodyPr/>
-                    <a:lstStyle/>
-                    <a:p>
-                      <a:pPr marL="0" indent="0" algn="ctr">
-                        <a:lnSpc>
-                          <a:spcPct val="100000"/>
-                        </a:lnSpc>
-                        <a:defRPr/>
-                      </a:pPr>
-                      <a:r>
-                        <a:rPr lang="en-US" sz="1200" b="0" i="0" u="none" strike="noStrike">
-                          <a:solidFill>
-                            <a:srgbClr val="FF4D4F"/>
-                          </a:solidFill>
-                          <a:latin typeface="Noto Sans SC"/>
-                          <a:ea typeface="Noto Sans SC"/>
-                          <a:cs typeface="Noto Sans SC"/>
-                          <a:sym typeface="Noto Sans SC"/>
-                        </a:rPr>
-                        <a:t>未恢复</a:t>
-                      </a:r>
-                      <a:endParaRPr lang="en-US" sz="1100"/>
-                    </a:p>
-                  </a:txBody>
-                  <a:tcPr marL="101600" marR="101600" marT="101600" marB="101600" anchor="ctr">
-                    <a:lnL>
-                      <a:noFill/>
-                    </a:lnL>
-                    <a:lnR>
-                      <a:noFill/>
-                    </a:lnR>
-                    <a:lnT w="12700" cap="flat" cmpd="sng" algn="ctr">
-                      <a:solidFill>
-                        <a:srgbClr val="0066CC"/>
-                      </a:solidFill>
-                      <a:prstDash val="solid"/>
-                      <a:round/>
-                      <a:headEnd type="none" w="med" len="med"/>
-                      <a:tailEnd type="none" w="med" len="med"/>
-                    </a:lnT>
-                    <a:lnB w="12700" cap="flat" cmpd="sng" algn="ctr">
-                      <a:solidFill>
-                        <a:srgbClr val="FFFFFF"/>
-                      </a:solidFill>
-                      <a:prstDash val="solid"/>
-                      <a:round/>
-                      <a:headEnd type="none" w="med" len="med"/>
-                      <a:tailEnd type="none" w="med" len="med"/>
-                    </a:lnB>
-                    <a:solidFill>
-                      <a:srgbClr val="FFFFFF">
-                        <a:alpha val="5000"/>
-                      </a:srgbClr>
-                    </a:solidFill>
-                  </a:tcPr>
-                </a:tc>
-                <a:extLst>
-                  <a:ext uri="{0D108BD9-81ED-4DB2-BD59-A6C34878D82A}">
-                    <a16:rowId xmlns:a16="http://schemas.microsoft.com/office/drawing/2014/main" val="10001"/>
-                  </a:ext>
-                </a:extLst>
-              </a:tr>
-              <a:tr h="571500">
-                <a:tc>
-                  <a:txBody>
-                    <a:bodyPr/>
-                    <a:lstStyle/>
-                    <a:p>
-                      <a:pPr marL="0" indent="0" algn="ctr">
-                        <a:lnSpc>
-                          <a:spcPct val="100000"/>
-                        </a:lnSpc>
-                        <a:defRPr/>
-                      </a:pPr>
-                      <a:r>
-                        <a:rPr lang="en-US" sz="1200" b="0" i="0" u="none" strike="noStrike">
-                          <a:solidFill>
-                            <a:srgbClr val="FFFFFF">
-                              <a:alpha val="85098"/>
-                            </a:srgbClr>
-                          </a:solidFill>
-                          <a:latin typeface="Noto Sans SC"/>
-                          <a:ea typeface="Noto Sans SC"/>
-                          <a:cs typeface="Noto Sans SC"/>
-                          <a:sym typeface="Noto Sans SC"/>
-                        </a:rPr>
-                        <a:t>10:15:30</a:t>
-                      </a:r>
-                      <a:endParaRPr lang="en-US" sz="1100"/>
-                    </a:p>
-                  </a:txBody>
-                  <a:tcPr marL="101600" marR="101600" marT="101600" marB="101600" anchor="ctr">
-                    <a:lnL>
-                      <a:noFill/>
-                    </a:lnL>
-                    <a:lnR>
-                      <a:noFill/>
-                    </a:lnR>
-                    <a:lnT w="12700" cap="flat" cmpd="sng" algn="ctr">
-                      <a:solidFill>
-                        <a:srgbClr val="FFFFFF"/>
-                      </a:solidFill>
-                      <a:prstDash val="solid"/>
-                      <a:round/>
-                      <a:headEnd type="none" w="med" len="med"/>
-                      <a:tailEnd type="none" w="med" len="med"/>
-                    </a:lnT>
-                    <a:lnB w="12700" cap="flat" cmpd="sng" algn="ctr">
-                      <a:solidFill>
-                        <a:srgbClr val="FFFFFF"/>
-                      </a:solidFill>
-                      <a:prstDash val="solid"/>
-                      <a:round/>
-                      <a:headEnd type="none" w="med" len="med"/>
-                      <a:tailEnd type="none" w="med" len="med"/>
-                    </a:lnB>
-                    <a:solidFill>
-                      <a:srgbClr val="FFFFFF">
-                        <a:alpha val="5000"/>
-                      </a:srgbClr>
-                    </a:solidFill>
-                  </a:tcPr>
-                </a:tc>
-                <a:tc>
-                  <a:txBody>
-                    <a:bodyPr/>
-                    <a:lstStyle/>
-                    <a:p>
-                      <a:pPr marL="0" indent="0" algn="ctr">
-                        <a:lnSpc>
-                          <a:spcPct val="100000"/>
-                        </a:lnSpc>
-                        <a:defRPr/>
-                      </a:pPr>
-                      <a:r>
-                        <a:rPr lang="en-US" sz="1200" b="0" i="0" u="none" strike="noStrike">
-                          <a:solidFill>
-                            <a:srgbClr val="FFFFFF">
-                              <a:alpha val="85098"/>
-                            </a:srgbClr>
-                          </a:solidFill>
-                          <a:latin typeface="Noto Sans SC"/>
-                          <a:ea typeface="Noto Sans SC"/>
-                          <a:cs typeface="Noto Sans SC"/>
-                          <a:sym typeface="Noto Sans SC"/>
-                        </a:rPr>
-                        <a:t>B-7402-Z</a:t>
-                      </a:r>
-                      <a:endParaRPr lang="en-US" sz="1100"/>
-                    </a:p>
-                  </a:txBody>
-                  <a:tcPr marL="101600" marR="101600" marT="101600" marB="101600" anchor="ctr">
-                    <a:lnL>
-                      <a:noFill/>
-                    </a:lnL>
-                    <a:lnR>
-                      <a:noFill/>
-                    </a:lnR>
-                    <a:lnT w="12700" cap="flat" cmpd="sng" algn="ctr">
-                      <a:solidFill>
-                        <a:srgbClr val="FFFFFF"/>
-                      </a:solidFill>
-                      <a:prstDash val="solid"/>
-                      <a:round/>
-                      <a:headEnd type="none" w="med" len="med"/>
-                      <a:tailEnd type="none" w="med" len="med"/>
-                    </a:lnT>
-                    <a:lnB w="12700" cap="flat" cmpd="sng" algn="ctr">
-                      <a:solidFill>
-                        <a:srgbClr val="FFFFFF"/>
-                      </a:solidFill>
-                      <a:prstDash val="solid"/>
-                      <a:round/>
-                      <a:headEnd type="none" w="med" len="med"/>
-                      <a:tailEnd type="none" w="med" len="med"/>
-                    </a:lnB>
-                    <a:solidFill>
-                      <a:srgbClr val="FFFFFF">
-                        <a:alpha val="5000"/>
-                      </a:srgbClr>
-                    </a:solidFill>
-                  </a:tcPr>
-                </a:tc>
-                <a:tc>
-                  <a:txBody>
-                    <a:bodyPr/>
-                    <a:lstStyle/>
-                    <a:p>
-                      <a:pPr marL="0" indent="0" algn="ctr">
-                        <a:lnSpc>
-                          <a:spcPct val="100000"/>
-                        </a:lnSpc>
-                        <a:defRPr/>
-                      </a:pPr>
-                      <a:r>
-                        <a:rPr lang="en-US" sz="1200" b="0" i="0" u="none" strike="noStrike">
-                          <a:solidFill>
-                            <a:srgbClr val="FFC107"/>
-                          </a:solidFill>
-                          <a:latin typeface="Noto Sans SC"/>
-                          <a:ea typeface="Noto Sans SC"/>
-                          <a:cs typeface="Noto Sans SC"/>
-                          <a:sym typeface="Noto Sans SC"/>
-                        </a:rPr>
-                        <a:t>数据校验失败</a:t>
-                      </a:r>
-                      <a:endParaRPr lang="en-US" sz="1100"/>
-                    </a:p>
-                  </a:txBody>
-                  <a:tcPr marL="101600" marR="101600" marT="101600" marB="101600" anchor="ctr">
-                    <a:lnL>
-                      <a:noFill/>
-                    </a:lnL>
-                    <a:lnR>
-                      <a:noFill/>
-                    </a:lnR>
-                    <a:lnT w="12700" cap="flat" cmpd="sng" algn="ctr">
-                      <a:solidFill>
-                        <a:srgbClr val="FFFFFF"/>
-                      </a:solidFill>
-                      <a:prstDash val="solid"/>
-                      <a:round/>
-                      <a:headEnd type="none" w="med" len="med"/>
-                      <a:tailEnd type="none" w="med" len="med"/>
-                    </a:lnT>
-                    <a:lnB w="12700" cap="flat" cmpd="sng" algn="ctr">
-                      <a:solidFill>
-                        <a:srgbClr val="FFFFFF"/>
-                      </a:solidFill>
-                      <a:prstDash val="solid"/>
-                      <a:round/>
-                      <a:headEnd type="none" w="med" len="med"/>
-                      <a:tailEnd type="none" w="med" len="med"/>
-                    </a:lnB>
-                    <a:solidFill>
-                      <a:srgbClr val="FFFFFF">
-                        <a:alpha val="5000"/>
-                      </a:srgbClr>
-                    </a:solidFill>
-                  </a:tcPr>
-                </a:tc>
-                <a:tc>
-                  <a:txBody>
-                    <a:bodyPr/>
-                    <a:lstStyle/>
-                    <a:p>
-                      <a:pPr marL="0" indent="0" algn="ctr">
-                        <a:lnSpc>
-                          <a:spcPct val="100000"/>
-                        </a:lnSpc>
-                        <a:defRPr/>
-                      </a:pPr>
-                      <a:r>
-                        <a:rPr lang="en-US" sz="1200" b="0" i="0" u="none" strike="noStrike">
-                          <a:solidFill>
-                            <a:srgbClr val="52C41A"/>
-                          </a:solidFill>
-                          <a:latin typeface="Noto Sans SC"/>
-                          <a:ea typeface="Noto Sans SC"/>
-                          <a:cs typeface="Noto Sans SC"/>
-                          <a:sym typeface="Noto Sans SC"/>
-                        </a:rPr>
-                        <a:t>已自愈</a:t>
-                      </a:r>
-                      <a:endParaRPr lang="en-US" sz="1100"/>
-                    </a:p>
-                  </a:txBody>
-                  <a:tcPr marL="101600" marR="101600" marT="101600" marB="101600" anchor="ctr">
-                    <a:lnL>
-                      <a:noFill/>
-                    </a:lnL>
-                    <a:lnR>
-                      <a:noFill/>
-                    </a:lnR>
-                    <a:lnT w="12700" cap="flat" cmpd="sng" algn="ctr">
-                      <a:solidFill>
-                        <a:srgbClr val="FFFFFF"/>
-                      </a:solidFill>
-                      <a:prstDash val="solid"/>
-                      <a:round/>
-                      <a:headEnd type="none" w="med" len="med"/>
-                      <a:tailEnd type="none" w="med" len="med"/>
-                    </a:lnT>
-                    <a:lnB w="12700" cap="flat" cmpd="sng" algn="ctr">
-                      <a:solidFill>
-                        <a:srgbClr val="FFFFFF"/>
-                      </a:solidFill>
-                      <a:prstDash val="solid"/>
-                      <a:round/>
-                      <a:headEnd type="none" w="med" len="med"/>
-                      <a:tailEnd type="none" w="med" len="med"/>
-                    </a:lnB>
-                    <a:solidFill>
-                      <a:srgbClr val="FFFFFF">
-                        <a:alpha val="5000"/>
-                      </a:srgbClr>
-                    </a:solidFill>
-                  </a:tcPr>
-                </a:tc>
-                <a:extLst>
-                  <a:ext uri="{0D108BD9-81ED-4DB2-BD59-A6C34878D82A}">
-                    <a16:rowId xmlns:a16="http://schemas.microsoft.com/office/drawing/2014/main" val="10002"/>
-                  </a:ext>
-                </a:extLst>
-              </a:tr>
-              <a:tr h="571500">
-                <a:tc>
-                  <a:txBody>
-                    <a:bodyPr/>
-                    <a:lstStyle/>
-                    <a:p>
-                      <a:pPr marL="0" indent="0" algn="ctr">
-                        <a:lnSpc>
-                          <a:spcPct val="100000"/>
-                        </a:lnSpc>
-                        <a:defRPr/>
-                      </a:pPr>
-                      <a:r>
-                        <a:rPr lang="en-US" sz="1200" b="0" i="0" u="none" strike="noStrike">
-                          <a:solidFill>
-                            <a:srgbClr val="FFFFFF">
-                              <a:alpha val="85098"/>
-                            </a:srgbClr>
-                          </a:solidFill>
-                          <a:latin typeface="Noto Sans SC"/>
-                          <a:ea typeface="Noto Sans SC"/>
-                          <a:cs typeface="Noto Sans SC"/>
-                          <a:sym typeface="Noto Sans SC"/>
-                        </a:rPr>
-                        <a:t>10:08:45</a:t>
-                      </a:r>
-                      <a:endParaRPr lang="en-US" sz="1100"/>
-                    </a:p>
-                  </a:txBody>
-                  <a:tcPr marL="101600" marR="101600" marT="101600" marB="101600" anchor="ctr">
-                    <a:lnL>
-                      <a:noFill/>
-                    </a:lnL>
-                    <a:lnR>
-                      <a:noFill/>
-                    </a:lnR>
-                    <a:lnT w="12700" cap="flat" cmpd="sng" algn="ctr">
-                      <a:solidFill>
-                        <a:srgbClr val="FFFFFF"/>
-                      </a:solidFill>
-                      <a:prstDash val="solid"/>
-                      <a:round/>
-                      <a:headEnd type="none" w="med" len="med"/>
-                      <a:tailEnd type="none" w="med" len="med"/>
-                    </a:lnT>
-                    <a:lnB>
-                      <a:noFill/>
-                    </a:lnB>
-                    <a:solidFill>
-                      <a:srgbClr val="FFFFFF">
-                        <a:alpha val="5000"/>
-                      </a:srgbClr>
-                    </a:solidFill>
-                  </a:tcPr>
-                </a:tc>
-                <a:tc>
-                  <a:txBody>
-                    <a:bodyPr/>
-                    <a:lstStyle/>
-                    <a:p>
-                      <a:pPr marL="0" indent="0" algn="ctr">
-                        <a:lnSpc>
-                          <a:spcPct val="100000"/>
-                        </a:lnSpc>
-                        <a:defRPr/>
-                      </a:pPr>
-                      <a:r>
-                        <a:rPr lang="en-US" sz="1200" b="0" i="0" u="none" strike="noStrike">
-                          <a:solidFill>
-                            <a:srgbClr val="FFFFFF">
-                              <a:alpha val="85098"/>
-                            </a:srgbClr>
-                          </a:solidFill>
-                          <a:latin typeface="Noto Sans SC"/>
-                          <a:ea typeface="Noto Sans SC"/>
-                          <a:cs typeface="Noto Sans SC"/>
-                          <a:sym typeface="Noto Sans SC"/>
-                        </a:rPr>
-                        <a:t>B-1055-L</a:t>
-                      </a:r>
-                      <a:endParaRPr lang="en-US" sz="1100"/>
-                    </a:p>
-                  </a:txBody>
-                  <a:tcPr marL="101600" marR="101600" marT="101600" marB="101600" anchor="ctr">
-                    <a:lnL>
-                      <a:noFill/>
-                    </a:lnL>
-                    <a:lnR>
-                      <a:noFill/>
-                    </a:lnR>
-                    <a:lnT w="12700" cap="flat" cmpd="sng" algn="ctr">
-                      <a:solidFill>
-                        <a:srgbClr val="FFFFFF"/>
-                      </a:solidFill>
-                      <a:prstDash val="solid"/>
-                      <a:round/>
-                      <a:headEnd type="none" w="med" len="med"/>
-                      <a:tailEnd type="none" w="med" len="med"/>
-                    </a:lnT>
-                    <a:lnB>
-                      <a:noFill/>
-                    </a:lnB>
-                    <a:solidFill>
-                      <a:srgbClr val="FFFFFF">
-                        <a:alpha val="5000"/>
-                      </a:srgbClr>
-                    </a:solidFill>
-                  </a:tcPr>
-                </a:tc>
-                <a:tc>
-                  <a:txBody>
-                    <a:bodyPr/>
-                    <a:lstStyle/>
-                    <a:p>
-                      <a:pPr marL="0" indent="0" algn="ctr">
-                        <a:lnSpc>
-                          <a:spcPct val="100000"/>
-                        </a:lnSpc>
-                        <a:defRPr/>
-                      </a:pPr>
-                      <a:r>
-                        <a:rPr lang="en-US" sz="1200" b="0" i="0" u="none" strike="noStrike">
-                          <a:solidFill>
-                            <a:srgbClr val="FFC107"/>
-                          </a:solidFill>
-                          <a:latin typeface="Noto Sans SC"/>
-                          <a:ea typeface="Noto Sans SC"/>
-                          <a:cs typeface="Noto Sans SC"/>
-                          <a:sym typeface="Noto Sans SC"/>
-                        </a:rPr>
-                        <a:t>资源占用过高</a:t>
-                      </a:r>
-                      <a:endParaRPr lang="en-US" sz="1100"/>
-                    </a:p>
-                  </a:txBody>
-                  <a:tcPr marL="101600" marR="101600" marT="101600" marB="101600" anchor="ctr">
-                    <a:lnL>
-                      <a:noFill/>
-                    </a:lnL>
-                    <a:lnR>
-                      <a:noFill/>
-                    </a:lnR>
-                    <a:lnT w="12700" cap="flat" cmpd="sng" algn="ctr">
-                      <a:solidFill>
-                        <a:srgbClr val="FFFFFF"/>
-                      </a:solidFill>
-                      <a:prstDash val="solid"/>
-                      <a:round/>
-                      <a:headEnd type="none" w="med" len="med"/>
-                      <a:tailEnd type="none" w="med" len="med"/>
-                    </a:lnT>
-                    <a:lnB>
-                      <a:noFill/>
-                    </a:lnB>
-                    <a:solidFill>
-                      <a:srgbClr val="FFFFFF">
-                        <a:alpha val="5000"/>
-                      </a:srgbClr>
-                    </a:solidFill>
-                  </a:tcPr>
-                </a:tc>
-                <a:tc>
-                  <a:txBody>
-                    <a:bodyPr/>
-                    <a:lstStyle/>
-                    <a:p>
-                      <a:pPr marL="0" indent="0" algn="ctr">
-                        <a:lnSpc>
-                          <a:spcPct val="100000"/>
-                        </a:lnSpc>
-                        <a:defRPr/>
-                      </a:pPr>
-                      <a:r>
-                        <a:rPr lang="en-US" sz="1200" b="0" i="0" u="none" strike="noStrike">
-                          <a:solidFill>
-                            <a:srgbClr val="FF4D4F"/>
-                          </a:solidFill>
-                          <a:latin typeface="Noto Sans SC"/>
-                          <a:ea typeface="Noto Sans SC"/>
-                          <a:cs typeface="Noto Sans SC"/>
-                          <a:sym typeface="Noto Sans SC"/>
-                        </a:rPr>
-                        <a:t>处理中</a:t>
-                      </a:r>
-                      <a:endParaRPr lang="en-US" sz="1100"/>
-                    </a:p>
-                  </a:txBody>
-                  <a:tcPr marL="101600" marR="101600" marT="101600" marB="101600" anchor="ctr">
-                    <a:lnL>
-                      <a:noFill/>
-                    </a:lnL>
-                    <a:lnR>
-                      <a:noFill/>
-                    </a:lnR>
-                    <a:lnT w="12700" cap="flat" cmpd="sng" algn="ctr">
-                      <a:solidFill>
-                        <a:srgbClr val="FFFFFF"/>
-                      </a:solidFill>
-                      <a:prstDash val="solid"/>
-                      <a:round/>
-                      <a:headEnd type="none" w="med" len="med"/>
-                      <a:tailEnd type="none" w="med" len="med"/>
-                    </a:lnT>
-                    <a:lnB>
-                      <a:noFill/>
-                    </a:lnB>
-                    <a:solidFill>
-                      <a:srgbClr val="FFFFFF">
-                        <a:alpha val="5000"/>
-                      </a:srgbClr>
-                    </a:solidFill>
-                  </a:tcPr>
-                </a:tc>
-                <a:extLst>
-                  <a:ext uri="{0D108BD9-81ED-4DB2-BD59-A6C34878D82A}">
-                    <a16:rowId xmlns:a16="http://schemas.microsoft.com/office/drawing/2014/main" val="10003"/>
-                  </a:ext>
-                </a:extLst>
-              </a:tr>
-            </a:tbl>
-          </a:graphicData>
-        </a:graphic>
-      </p:graphicFrame>
+            <a:r>
+              <a:rPr lang="en-US" sz="2800" b="1" i="0" u="none" strike="noStrike" dirty="0">
+                <a:solidFill>
+                  <a:srgbClr val="52C41A"/>
+                </a:solidFill>
+                <a:latin typeface="Noto Sans SC"/>
+                <a:ea typeface="Noto Sans SC"/>
+                <a:cs typeface="Noto Sans SC"/>
+                <a:sym typeface="Noto Sans SC"/>
+              </a:rPr>
+              <a:t>.1%</a:t>
+            </a:r>
+            <a:endParaRPr lang="en-US" sz="1100" dirty="0"/>
+          </a:p>
+        </p:txBody>
+      </p:sp>
       <p:sp>
         <p:nvSpPr>
           <p:cNvPr id="18" name="AutoShape 18"/>
@@ -20027,6 +19039,66 @@
           </a:p>
         </p:txBody>
       </p:sp>
+      <p:pic>
+        <p:nvPicPr>
+          <p:cNvPr id="21" name="图片 20">
+            <a:extLst>
+              <a:ext uri="{FF2B5EF4-FFF2-40B4-BE49-F238E27FC236}">
+                <a16:creationId xmlns:a16="http://schemas.microsoft.com/office/drawing/2014/main" id="{A8E0A5E6-3320-9790-103B-F186BE9FAC26}"/>
+              </a:ext>
+            </a:extLst>
+          </p:cNvPr>
+          <p:cNvPicPr>
+            <a:picLocks noChangeAspect="1"/>
+          </p:cNvPicPr>
+          <p:nvPr/>
+        </p:nvPicPr>
+        <p:blipFill>
+          <a:blip r:embed="rId4"/>
+          <a:stretch>
+            <a:fillRect/>
+          </a:stretch>
+        </p:blipFill>
+        <p:spPr>
+          <a:xfrm>
+            <a:off x="730756" y="3376480"/>
+            <a:ext cx="3142744" cy="2783020"/>
+          </a:xfrm>
+          <a:prstGeom prst="rect">
+            <a:avLst/>
+          </a:prstGeom>
+        </p:spPr>
+      </p:pic>
+      <p:pic>
+        <p:nvPicPr>
+          <p:cNvPr id="23" name="图片 22">
+            <a:extLst>
+              <a:ext uri="{FF2B5EF4-FFF2-40B4-BE49-F238E27FC236}">
+                <a16:creationId xmlns:a16="http://schemas.microsoft.com/office/drawing/2014/main" id="{82A1E498-B6F1-75CF-F2FD-68EE8B51A4C9}"/>
+              </a:ext>
+            </a:extLst>
+          </p:cNvPr>
+          <p:cNvPicPr>
+            <a:picLocks noChangeAspect="1"/>
+          </p:cNvPicPr>
+          <p:nvPr/>
+        </p:nvPicPr>
+        <p:blipFill>
+          <a:blip r:embed="rId5"/>
+          <a:stretch>
+            <a:fillRect/>
+          </a:stretch>
+        </p:blipFill>
+        <p:spPr>
+          <a:xfrm>
+            <a:off x="5939374" y="3243085"/>
+            <a:ext cx="5521870" cy="2784830"/>
+          </a:xfrm>
+          <a:prstGeom prst="rect">
+            <a:avLst/>
+          </a:prstGeom>
+        </p:spPr>
+      </p:pic>
     </p:spTree>
   </p:cSld>
   <p:clrMapOvr>
@@ -20330,14 +19402,14 @@
           <a:bodyPr vert="horz" wrap="square" lIns="0" tIns="0" rIns="0" bIns="0" rtlCol="0" anchor="ctr" anchorCtr="0"/>
           <a:lstStyle/>
           <a:p>
-            <a:pPr marL="0" indent="0" algn="l">
+            <a:pPr>
               <a:lnSpc>
                 <a:spcPct val="125000"/>
               </a:lnSpc>
               <a:defRPr/>
             </a:pPr>
             <a:r>
-              <a:rPr lang="en-US" sz="1400" b="0" i="0" u="none" strike="noStrike">
+              <a:rPr lang="en-US" sz="1400" b="0" i="0" u="none" strike="noStrike" dirty="0">
                 <a:solidFill>
                   <a:srgbClr val="FFFFFF">
                     <a:alpha val="80000"/>
@@ -20348,9 +19420,85 @@
                 <a:cs typeface="Noto Sans SC"/>
                 <a:sym typeface="Noto Sans SC"/>
               </a:rPr>
-              <a:t>“你好，帮我诊断一下 block_12345 任务为什么执行失败了？从日志看好像是节点出了问题，但我不确定具体原因。”</a:t>
+              <a:t>“</a:t>
             </a:r>
-            <a:endParaRPr lang="en-US" sz="1100"/>
+            <a:r>
+              <a:rPr lang="en-US" sz="1400" b="0" i="0" u="none" strike="noStrike" dirty="0" err="1">
+                <a:solidFill>
+                  <a:srgbClr val="FFFFFF">
+                    <a:alpha val="80000"/>
+                  </a:srgbClr>
+                </a:solidFill>
+                <a:latin typeface="Noto Sans SC"/>
+                <a:ea typeface="Noto Sans SC"/>
+                <a:cs typeface="Noto Sans SC"/>
+                <a:sym typeface="Noto Sans SC"/>
+              </a:rPr>
+              <a:t>你好，帮我诊断一下</a:t>
+            </a:r>
+            <a:r>
+              <a:rPr lang="en-US" sz="1400" b="0" i="0" u="none" strike="noStrike" dirty="0">
+                <a:solidFill>
+                  <a:srgbClr val="FFFFFF">
+                    <a:alpha val="80000"/>
+                  </a:srgbClr>
+                </a:solidFill>
+                <a:latin typeface="Noto Sans SC"/>
+                <a:ea typeface="Noto Sans SC"/>
+                <a:cs typeface="Noto Sans SC"/>
+                <a:sym typeface="Noto Sans SC"/>
+              </a:rPr>
+              <a:t> </a:t>
+            </a:r>
+            <a:r>
+              <a:rPr lang="en-US" altLang="zh-CN" dirty="0">
+                <a:solidFill>
+                  <a:schemeClr val="bg1"/>
+                </a:solidFill>
+              </a:rPr>
+              <a:t>blk_-4893747709300968179</a:t>
+            </a:r>
+            <a:r>
+              <a:rPr lang="en-US" sz="1400" b="0" i="0" u="none" strike="noStrike" dirty="0">
+                <a:solidFill>
+                  <a:schemeClr val="bg1"/>
+                </a:solidFill>
+                <a:latin typeface="Noto Sans SC"/>
+                <a:ea typeface="Noto Sans SC"/>
+                <a:cs typeface="Noto Sans SC"/>
+                <a:sym typeface="Noto Sans SC"/>
+              </a:rPr>
+              <a:t> </a:t>
+            </a:r>
+            <a:r>
+              <a:rPr lang="en-US" sz="1400" b="0" i="0" u="none" strike="noStrike" dirty="0" err="1">
+                <a:solidFill>
+                  <a:srgbClr val="FFFFFF">
+                    <a:alpha val="80000"/>
+                  </a:srgbClr>
+                </a:solidFill>
+                <a:latin typeface="Noto Sans SC"/>
+                <a:ea typeface="Noto Sans SC"/>
+                <a:cs typeface="Noto Sans SC"/>
+                <a:sym typeface="Noto Sans SC"/>
+              </a:rPr>
+              <a:t>任务为什么执行失败了？从日志看好像是节点出了问题，但我不确定具体原因</a:t>
+            </a:r>
+            <a:r>
+              <a:rPr lang="en-US" sz="1400" b="0" i="0" u="none" strike="noStrike" dirty="0">
+                <a:solidFill>
+                  <a:srgbClr val="FFFFFF">
+                    <a:alpha val="80000"/>
+                  </a:srgbClr>
+                </a:solidFill>
+                <a:latin typeface="Noto Sans SC"/>
+                <a:ea typeface="Noto Sans SC"/>
+                <a:cs typeface="Noto Sans SC"/>
+                <a:sym typeface="Noto Sans SC"/>
+              </a:rPr>
+              <a:t>。”</a:t>
+            </a:r>
+            <a:endParaRPr lang="en-US" sz="1100" dirty="0"/>
           </a:p>
         </p:txBody>
       </p:sp>
@@ -20394,7 +19542,7 @@
         </p:nvSpPr>
         <p:spPr>
           <a:xfrm>
-            <a:off x="4699000" y="1778000"/>
+            <a:off x="4718050" y="1778000"/>
             <a:ext cx="3429000" cy="3683000"/>
           </a:xfrm>
           <a:prstGeom prst="roundRect">
@@ -20571,99 +19719,17 @@
               </a:lnSpc>
               <a:defRPr/>
             </a:pPr>
-            <a:r>
-              <a:rPr lang="en-US" sz="1300" b="1" i="0" u="none" strike="noStrike">
-                <a:solidFill>
-                  <a:srgbClr val="0066CC"/>
-                </a:solidFill>
-                <a:latin typeface="Noto Sans SC"/>
-                <a:ea typeface="Noto Sans SC"/>
-                <a:cs typeface="Noto Sans SC"/>
-                <a:sym typeface="Noto Sans SC"/>
-              </a:rPr>
-              <a:t>[检测结果]</a:t>
-            </a:r>
-            <a:r>
-              <a:rPr lang="en-US" sz="1300" b="0" i="0" u="none" strike="noStrike">
-                <a:solidFill>
-                  <a:srgbClr val="FFFFFF">
-                    <a:alpha val="80000"/>
-                  </a:srgbClr>
-                </a:solidFill>
-                <a:latin typeface="Noto Sans SC"/>
-                <a:ea typeface="Noto Sans SC"/>
-                <a:cs typeface="Noto Sans SC"/>
-                <a:sym typeface="Noto Sans SC"/>
-              </a:rPr>
-              <a:t>block_12345 的 E5 事件连续触发 3 次，已达到系统异常阈值。</a:t>
-            </a:r>
-            <a:endParaRPr lang="en-US" sz="1100"/>
-          </a:p>
-          <a:p>
-            <a:pPr marL="0" indent="0" algn="l">
-              <a:lnSpc>
-                <a:spcPct val="116666"/>
-              </a:lnSpc>
-            </a:pPr>
-            <a:r>
-              <a:rPr lang="en-US" sz="1300" b="1" i="0" u="none" strike="noStrike">
-                <a:solidFill>
-                  <a:srgbClr val="0066CC"/>
-                </a:solidFill>
-                <a:latin typeface="Noto Sans SC"/>
-                <a:ea typeface="Noto Sans SC"/>
-                <a:cs typeface="Noto Sans SC"/>
-                <a:sym typeface="Noto Sans SC"/>
-              </a:rPr>
-              <a:t>[根因分析]</a:t>
-            </a:r>
-            <a:r>
-              <a:rPr lang="en-US" sz="1300" b="0" i="0" u="none" strike="noStrike">
-                <a:solidFill>
-                  <a:srgbClr val="FFFFFF">
-                    <a:alpha val="80000"/>
-                  </a:srgbClr>
-                </a:solidFill>
-                <a:latin typeface="Noto Sans SC"/>
-                <a:ea typeface="Noto Sans SC"/>
-                <a:cs typeface="Noto Sans SC"/>
-                <a:sym typeface="Noto Sans SC"/>
-              </a:rPr>
-              <a:t>RAG 检索显示，E5 错误关联 DataNode 节点通信超时，需优先排查节点状态。</a:t>
-            </a:r>
-          </a:p>
-          <a:p>
-            <a:pPr marL="0" indent="0" algn="l">
-              <a:lnSpc>
-                <a:spcPct val="116666"/>
-              </a:lnSpc>
-            </a:pPr>
-            <a:r>
-              <a:rPr lang="en-US" sz="1300" b="1" i="0" u="none" strike="noStrike">
-                <a:solidFill>
-                  <a:srgbClr val="0066CC"/>
-                </a:solidFill>
-                <a:latin typeface="Noto Sans SC"/>
-                <a:ea typeface="Noto Sans SC"/>
-                <a:cs typeface="Noto Sans SC"/>
-                <a:sym typeface="Noto Sans SC"/>
-              </a:rPr>
-              <a:t>[修复建议]</a:t>
-            </a:r>
-            <a:r>
-              <a:rPr lang="en-US" sz="1300" b="0" i="0" u="none" strike="noStrike">
-                <a:solidFill>
-                  <a:srgbClr val="FFFFFF">
-                    <a:alpha val="80000"/>
-                  </a:srgbClr>
-                </a:solidFill>
-                <a:latin typeface="Noto Sans SC"/>
-                <a:ea typeface="Noto Sans SC"/>
-                <a:cs typeface="Noto Sans SC"/>
-                <a:sym typeface="Noto Sans SC"/>
-              </a:rPr>
-              <a:t>建议尝试重启 DataNode 服务，并同步检查底层网络链路稳定性。</a:t>
-            </a:r>
+            <a:endParaRPr lang="en-US" sz="1300" b="0" i="0" u="none" strike="noStrike" dirty="0">
+              <a:solidFill>
+                <a:srgbClr val="FFFFFF">
+                  <a:alpha val="80000"/>
+                </a:srgbClr>
+              </a:solidFill>
+              <a:latin typeface="Noto Sans SC"/>
+              <a:ea typeface="Noto Sans SC"/>
+              <a:cs typeface="Noto Sans SC"/>
+              <a:sym typeface="Noto Sans SC"/>
+            </a:endParaRPr>
           </a:p>
         </p:txBody>
       </p:sp>
@@ -20855,52 +19921,14 @@
       </p:cxnSp>
       <p:sp>
         <p:nvSpPr>
-          <p:cNvPr id="20" name="AutoShape 20"/>
+          <p:cNvPr id="23" name="AutoShape 23"/>
           <p:cNvSpPr/>
           <p:nvPr/>
         </p:nvSpPr>
         <p:spPr>
           <a:xfrm>
-            <a:off x="8763000" y="3048000"/>
-            <a:ext cx="2921000" cy="1270000"/>
-          </a:xfrm>
-          <a:prstGeom prst="roundRect">
-            <a:avLst>
-              <a:gd name="adj" fmla="val 0"/>
-            </a:avLst>
-          </a:prstGeom>
-          <a:solidFill>
-            <a:srgbClr val="F59E0B">
-              <a:alpha val="10000"/>
-            </a:srgbClr>
-          </a:solidFill>
-          <a:ln w="25400" cap="flat" cmpd="sng">
-            <a:noFill/>
-            <a:prstDash val="solid"/>
-            <a:round/>
-          </a:ln>
-        </p:spPr>
-        <p:txBody>
-          <a:bodyPr vert="horz" wrap="square" lIns="63500" tIns="63500" rIns="63500" bIns="63500" rtlCol="0" anchor="ctr"/>
-          <a:lstStyle/>
-          <a:p>
-            <a:pPr algn="ctr">
-              <a:defRPr/>
-            </a:pPr>
-            <a:endParaRPr/>
-          </a:p>
-        </p:txBody>
-      </p:sp>
-      <p:sp>
-        <p:nvSpPr>
-          <p:cNvPr id="21" name="AutoShape 21"/>
-          <p:cNvSpPr/>
-          <p:nvPr/>
-        </p:nvSpPr>
-        <p:spPr>
-          <a:xfrm>
-            <a:off x="8890000" y="3175000"/>
-            <a:ext cx="2667000" cy="1016000"/>
+            <a:off x="8763000" y="4699000"/>
+            <a:ext cx="1333500" cy="508000"/>
           </a:xfrm>
           <a:prstGeom prst="rect">
             <a:avLst/>
@@ -20916,89 +19944,25 @@
           <a:bodyPr vert="horz" wrap="square" lIns="0" tIns="0" rIns="0" bIns="0" rtlCol="0" anchor="ctr" anchorCtr="0"/>
           <a:lstStyle/>
           <a:p>
-            <a:pPr marL="0" indent="0" algn="l">
+            <a:pPr marL="0" indent="0" algn="ctr">
               <a:lnSpc>
                 <a:spcPct val="125000"/>
               </a:lnSpc>
               <a:defRPr/>
             </a:pPr>
-            <a:r>
-              <a:rPr lang="en-US" sz="1400" b="1" i="0" u="none" strike="noStrike">
-                <a:solidFill>
-                  <a:srgbClr val="FCD34D"/>
-                </a:solidFill>
-                <a:latin typeface="Noto Sans SC"/>
-                <a:ea typeface="Noto Sans SC"/>
-                <a:cs typeface="Noto Sans SC"/>
-                <a:sym typeface="Noto Sans SC"/>
-              </a:rPr>
-              <a:t>警告：</a:t>
-            </a:r>
-            <a:r>
-              <a:rPr lang="en-US" sz="1300" b="0" i="0" u="none" strike="noStrike">
-                <a:solidFill>
-                  <a:srgbClr val="FFFFFF">
-                    <a:alpha val="80000"/>
-                  </a:srgbClr>
-                </a:solidFill>
-                <a:latin typeface="Noto Sans SC"/>
-                <a:ea typeface="Noto Sans SC"/>
-                <a:cs typeface="Noto Sans SC"/>
-                <a:sym typeface="Noto Sans SC"/>
-              </a:rPr>
-              <a:t>确认要执行“重启 DataNode 服务”吗？该操作属于高危行为，可能会影响当前运行中的业务数据同步。</a:t>
-            </a:r>
-            <a:endParaRPr lang="en-US" sz="1100"/>
-          </a:p>
-        </p:txBody>
-      </p:sp>
-      <p:sp>
-        <p:nvSpPr>
-          <p:cNvPr id="22" name="AutoShape 22"/>
+            <a:endParaRPr lang="en-US" sz="1100" dirty="0"/>
+          </a:p>
+        </p:txBody>
+      </p:sp>
+      <p:sp>
+        <p:nvSpPr>
+          <p:cNvPr id="25" name="AutoShape 25"/>
           <p:cNvSpPr/>
           <p:nvPr/>
         </p:nvSpPr>
         <p:spPr>
           <a:xfrm>
-            <a:off x="8763000" y="4699000"/>
-            <a:ext cx="1333500" cy="508000"/>
-          </a:xfrm>
-          <a:prstGeom prst="roundRect">
-            <a:avLst>
-              <a:gd name="adj" fmla="val 0"/>
-            </a:avLst>
-          </a:prstGeom>
-          <a:solidFill>
-            <a:srgbClr val="DC2626">
-              <a:alpha val="90000"/>
-            </a:srgbClr>
-          </a:solidFill>
-          <a:ln w="25400" cap="flat" cmpd="sng">
-            <a:noFill/>
-            <a:prstDash val="solid"/>
-            <a:round/>
-          </a:ln>
-        </p:spPr>
-        <p:txBody>
-          <a:bodyPr vert="horz" wrap="square" lIns="63500" tIns="63500" rIns="63500" bIns="63500" rtlCol="0" anchor="ctr"/>
-          <a:lstStyle/>
-          <a:p>
-            <a:pPr algn="ctr">
-              <a:defRPr/>
-            </a:pPr>
-            <a:endParaRPr/>
-          </a:p>
-        </p:txBody>
-      </p:sp>
-      <p:sp>
-        <p:nvSpPr>
-          <p:cNvPr id="23" name="AutoShape 23"/>
-          <p:cNvSpPr/>
-          <p:nvPr/>
-        </p:nvSpPr>
-        <p:spPr>
-          <a:xfrm>
-            <a:off x="8763000" y="4699000"/>
+            <a:off x="10287000" y="4699000"/>
             <a:ext cx="1333500" cy="508000"/>
           </a:xfrm>
           <a:prstGeom prst="rect">
@@ -21021,104 +19985,7 @@
               </a:lnSpc>
               <a:defRPr/>
             </a:pPr>
-            <a:r>
-              <a:rPr lang="en-US" sz="1400" b="1" i="0" u="none" strike="noStrike">
-                <a:solidFill>
-                  <a:srgbClr val="FFFFFF"/>
-                </a:solidFill>
-                <a:latin typeface="Noto Sans SC"/>
-                <a:ea typeface="Noto Sans SC"/>
-                <a:cs typeface="Noto Sans SC"/>
-                <a:sym typeface="Noto Sans SC"/>
-              </a:rPr>
-              <a:t>取消操作</a:t>
-            </a:r>
-            <a:endParaRPr lang="en-US" sz="1100"/>
-          </a:p>
-        </p:txBody>
-      </p:sp>
-      <p:sp>
-        <p:nvSpPr>
-          <p:cNvPr id="24" name="AutoShape 24"/>
-          <p:cNvSpPr/>
-          <p:nvPr/>
-        </p:nvSpPr>
-        <p:spPr>
-          <a:xfrm>
-            <a:off x="10287000" y="4699000"/>
-            <a:ext cx="1333500" cy="508000"/>
-          </a:xfrm>
-          <a:prstGeom prst="roundRect">
-            <a:avLst>
-              <a:gd name="adj" fmla="val 0"/>
-            </a:avLst>
-          </a:prstGeom>
-          <a:solidFill>
-            <a:srgbClr val="0066CC">
-              <a:alpha val="90000"/>
-            </a:srgbClr>
-          </a:solidFill>
-          <a:ln w="25400" cap="flat" cmpd="sng">
-            <a:noFill/>
-            <a:prstDash val="solid"/>
-            <a:round/>
-          </a:ln>
-        </p:spPr>
-        <p:txBody>
-          <a:bodyPr vert="horz" wrap="square" lIns="63500" tIns="63500" rIns="63500" bIns="63500" rtlCol="0" anchor="ctr"/>
-          <a:lstStyle/>
-          <a:p>
-            <a:pPr algn="ctr">
-              <a:defRPr/>
-            </a:pPr>
-            <a:endParaRPr/>
-          </a:p>
-        </p:txBody>
-      </p:sp>
-      <p:sp>
-        <p:nvSpPr>
-          <p:cNvPr id="25" name="AutoShape 25"/>
-          <p:cNvSpPr/>
-          <p:nvPr/>
-        </p:nvSpPr>
-        <p:spPr>
-          <a:xfrm>
-            <a:off x="10287000" y="4699000"/>
-            <a:ext cx="1333500" cy="508000"/>
-          </a:xfrm>
-          <a:prstGeom prst="rect">
-            <a:avLst/>
-          </a:prstGeom>
-          <a:noFill/>
-          <a:ln w="12700" cap="flat" cmpd="sng">
-            <a:noFill/>
-            <a:prstDash val="solid"/>
-            <a:round/>
-          </a:ln>
-        </p:spPr>
-        <p:txBody>
-          <a:bodyPr vert="horz" wrap="square" lIns="0" tIns="0" rIns="0" bIns="0" rtlCol="0" anchor="ctr" anchorCtr="0"/>
-          <a:lstStyle/>
-          <a:p>
-            <a:pPr marL="0" indent="0" algn="ctr">
-              <a:lnSpc>
-                <a:spcPct val="125000"/>
-              </a:lnSpc>
-              <a:defRPr/>
-            </a:pPr>
-            <a:r>
-              <a:rPr lang="en-US" sz="1400" b="1" i="0" u="none" strike="noStrike">
-                <a:solidFill>
-                  <a:srgbClr val="FFFFFF"/>
-                </a:solidFill>
-                <a:latin typeface="Noto Sans SC"/>
-                <a:ea typeface="Noto Sans SC"/>
-                <a:cs typeface="Noto Sans SC"/>
-                <a:sym typeface="Noto Sans SC"/>
-              </a:rPr>
-              <a:t>确认执行</a:t>
-            </a:r>
-            <a:endParaRPr lang="en-US" sz="1100"/>
+            <a:endParaRPr lang="en-US" sz="1100" dirty="0"/>
           </a:p>
         </p:txBody>
       </p:sp>
@@ -21209,6 +20076,96 @@
           </a:p>
         </p:txBody>
       </p:sp>
+      <p:pic>
+        <p:nvPicPr>
+          <p:cNvPr id="33" name="图片 32">
+            <a:extLst>
+              <a:ext uri="{FF2B5EF4-FFF2-40B4-BE49-F238E27FC236}">
+                <a16:creationId xmlns:a16="http://schemas.microsoft.com/office/drawing/2014/main" id="{C8D5A89F-3329-7D1E-E692-80717AE318F4}"/>
+              </a:ext>
+            </a:extLst>
+          </p:cNvPr>
+          <p:cNvPicPr>
+            <a:picLocks noChangeAspect="1"/>
+          </p:cNvPicPr>
+          <p:nvPr/>
+        </p:nvPicPr>
+        <p:blipFill>
+          <a:blip r:embed="rId10"/>
+          <a:stretch>
+            <a:fillRect/>
+          </a:stretch>
+        </p:blipFill>
+        <p:spPr>
+          <a:xfrm>
+            <a:off x="5057132" y="2823100"/>
+            <a:ext cx="2039583" cy="1259221"/>
+          </a:xfrm>
+          <a:prstGeom prst="rect">
+            <a:avLst/>
+          </a:prstGeom>
+        </p:spPr>
+      </p:pic>
+      <p:pic>
+        <p:nvPicPr>
+          <p:cNvPr id="35" name="图片 34">
+            <a:extLst>
+              <a:ext uri="{FF2B5EF4-FFF2-40B4-BE49-F238E27FC236}">
+                <a16:creationId xmlns:a16="http://schemas.microsoft.com/office/drawing/2014/main" id="{31F2F9B8-BD7C-8571-F9A7-4013B3E6FE8D}"/>
+              </a:ext>
+            </a:extLst>
+          </p:cNvPr>
+          <p:cNvPicPr>
+            <a:picLocks noChangeAspect="1"/>
+          </p:cNvPicPr>
+          <p:nvPr/>
+        </p:nvPicPr>
+        <p:blipFill>
+          <a:blip r:embed="rId11"/>
+          <a:stretch>
+            <a:fillRect/>
+          </a:stretch>
+        </p:blipFill>
+        <p:spPr>
+          <a:xfrm>
+            <a:off x="5087965" y="4131971"/>
+            <a:ext cx="2310324" cy="1832825"/>
+          </a:xfrm>
+          <a:prstGeom prst="rect">
+            <a:avLst/>
+          </a:prstGeom>
+        </p:spPr>
+      </p:pic>
+      <p:pic>
+        <p:nvPicPr>
+          <p:cNvPr id="38" name="图片 37">
+            <a:extLst>
+              <a:ext uri="{FF2B5EF4-FFF2-40B4-BE49-F238E27FC236}">
+                <a16:creationId xmlns:a16="http://schemas.microsoft.com/office/drawing/2014/main" id="{BC8E3945-128C-DC87-3BC1-7064EAEAAFDC}"/>
+              </a:ext>
+            </a:extLst>
+          </p:cNvPr>
+          <p:cNvPicPr>
+            <a:picLocks noChangeAspect="1"/>
+          </p:cNvPicPr>
+          <p:nvPr/>
+        </p:nvPicPr>
+        <p:blipFill>
+          <a:blip r:embed="rId12"/>
+          <a:stretch>
+            <a:fillRect/>
+          </a:stretch>
+        </p:blipFill>
+        <p:spPr>
+          <a:xfrm>
+            <a:off x="8559885" y="2794000"/>
+            <a:ext cx="3327230" cy="2303791"/>
+          </a:xfrm>
+          <a:prstGeom prst="rect">
+            <a:avLst/>
+          </a:prstGeom>
+        </p:spPr>
+      </p:pic>
     </p:spTree>
   </p:cSld>
   <p:clrMapOvr>
@@ -21341,8 +20298,8 @@
         </p:nvSpPr>
         <p:spPr>
           <a:xfrm>
-            <a:off x="762000" y="1651000"/>
-            <a:ext cx="5270500" cy="3683000"/>
+            <a:off x="489146" y="1651000"/>
+            <a:ext cx="5543354" cy="3683000"/>
           </a:xfrm>
           <a:prstGeom prst="roundRect">
             <a:avLst>
@@ -21485,105 +20442,17 @@
               </a:lnSpc>
               <a:defRPr/>
             </a:pPr>
-            <a:r>
-              <a:rPr lang="en-US" sz="1300" b="0" i="0" u="none" strike="noStrike">
-                <a:solidFill>
-                  <a:srgbClr val="DCDCDC">
-                    <a:alpha val="90196"/>
-                  </a:srgbClr>
-                </a:solidFill>
-                <a:latin typeface="Roboto Mono"/>
-                <a:ea typeface="Roboto Mono"/>
-                <a:cs typeface="Roboto Mono"/>
-                <a:sym typeface="Roboto Mono"/>
-              </a:rPr>
-              <a:t>2026-06-06 12:00:00, block_12345, E1, Load: 0.85, Mem: 72% ...</a:t>
-            </a:r>
-            <a:endParaRPr lang="en-US" sz="1100"/>
-          </a:p>
-          <a:p>
-            <a:pPr marL="0" indent="0" algn="l">
-              <a:lnSpc>
-                <a:spcPct val="116666"/>
-              </a:lnSpc>
-            </a:pPr>
-            <a:r>
-              <a:rPr lang="en-US" sz="1300" b="0" i="0" u="none" strike="noStrike">
-                <a:solidFill>
-                  <a:srgbClr val="DCDCDC">
-                    <a:alpha val="90196"/>
-                  </a:srgbClr>
-                </a:solidFill>
-                <a:latin typeface="Roboto Mono"/>
-                <a:ea typeface="Roboto Mono"/>
-                <a:cs typeface="Roboto Mono"/>
-                <a:sym typeface="Roboto Mono"/>
-              </a:rPr>
-              <a:t>2026-06-06 12:00:01, block_12346, E0, Load: 0.42, Mem: 68% ...</a:t>
-            </a:r>
-          </a:p>
-          <a:p>
-            <a:pPr marL="0" indent="0" algn="l">
-              <a:lnSpc>
-                <a:spcPct val="116666"/>
-              </a:lnSpc>
-            </a:pPr>
-            <a:r>
-              <a:rPr lang="en-US" sz="1300" b="0" i="0" u="none" strike="noStrike">
-                <a:solidFill>
-                  <a:srgbClr val="DCDCDC">
-                    <a:alpha val="90196"/>
-                  </a:srgbClr>
-                </a:solidFill>
-                <a:latin typeface="Roboto Mono"/>
-                <a:ea typeface="Roboto Mono"/>
-                <a:cs typeface="Roboto Mono"/>
-                <a:sym typeface="Roboto Mono"/>
-              </a:rPr>
-              <a:t>2026-06-06 12:00:02, block_12347, E2, Load: 0.91, Mem: 88% ...</a:t>
-            </a:r>
-          </a:p>
-          <a:p>
-            <a:pPr marL="0" indent="0" algn="l">
-              <a:lnSpc>
-                <a:spcPct val="116666"/>
-              </a:lnSpc>
-            </a:pPr>
-            <a:r>
-              <a:rPr lang="en-US" sz="1300" b="0" i="0" u="none" strike="noStrike">
-                <a:solidFill>
-                  <a:srgbClr val="FF6347">
-                    <a:alpha val="94902"/>
-                  </a:srgbClr>
-                </a:solidFill>
-                <a:latin typeface="Roboto Mono"/>
-                <a:ea typeface="Roboto Mono"/>
-                <a:cs typeface="Roboto Mono"/>
-                <a:sym typeface="Roboto Mono"/>
-              </a:rPr>
-              <a:t>2026-06-06 12:00:03, block_12348, E1, Load: 1.25, Mem: 94% ... [ALERT]</a:t>
-            </a:r>
-          </a:p>
-          <a:p>
-            <a:pPr marL="0" indent="0" algn="l">
-              <a:lnSpc>
-                <a:spcPct val="116666"/>
-              </a:lnSpc>
-            </a:pPr>
-            <a:r>
-              <a:rPr lang="en-US" sz="1300" b="0" i="0" u="none" strike="noStrike">
-                <a:solidFill>
-                  <a:srgbClr val="DCDCDC">
-                    <a:alpha val="90196"/>
-                  </a:srgbClr>
-                </a:solidFill>
-                <a:latin typeface="Roboto Mono"/>
-                <a:ea typeface="Roboto Mono"/>
-                <a:cs typeface="Roboto Mono"/>
-                <a:sym typeface="Roboto Mono"/>
-              </a:rPr>
-              <a:t>2026-06-06 12:00:04, block_12349, E0, Load: 0.38, Mem: 65% ...</a:t>
-            </a:r>
+            <a:endParaRPr lang="en-US" sz="1300" b="0" i="0" u="none" strike="noStrike" dirty="0">
+              <a:solidFill>
+                <a:srgbClr val="DCDCDC">
+                  <a:alpha val="90196"/>
+                </a:srgbClr>
+              </a:solidFill>
+              <a:latin typeface="Roboto Mono"/>
+              <a:ea typeface="Roboto Mono"/>
+              <a:cs typeface="Roboto Mono"/>
+              <a:sym typeface="Roboto Mono"/>
+            </a:endParaRPr>
           </a:p>
         </p:txBody>
       </p:sp>
@@ -21661,7 +20530,7 @@
               <a:defRPr/>
             </a:pPr>
             <a:r>
-              <a:rPr lang="en-US" sz="1800" b="1" i="0" u="none" strike="noStrike">
+              <a:rPr lang="en-US" sz="1800" b="1" i="0" u="none" strike="noStrike" dirty="0">
                 <a:solidFill>
                   <a:srgbClr val="0066CC"/>
                 </a:solidFill>
@@ -21670,9 +20539,33 @@
                 <a:cs typeface="Noto Sans SC"/>
                 <a:sym typeface="Noto Sans SC"/>
               </a:rPr>
-              <a:t>▍MLP 模型实时推理 (Inference)</a:t>
+              <a:t>▍MLP </a:t>
             </a:r>
-            <a:endParaRPr lang="en-US" sz="1100"/>
+            <a:r>
+              <a:rPr lang="en-US" sz="1800" b="1" i="0" u="none" strike="noStrike" dirty="0" err="1">
+                <a:solidFill>
+                  <a:srgbClr val="0066CC"/>
+                </a:solidFill>
+                <a:latin typeface="Noto Sans SC"/>
+                <a:ea typeface="Noto Sans SC"/>
+                <a:cs typeface="Noto Sans SC"/>
+                <a:sym typeface="Noto Sans SC"/>
+              </a:rPr>
+              <a:t>模型实时推理</a:t>
+            </a:r>
+            <a:r>
+              <a:rPr lang="en-US" sz="1800" b="1" i="0" u="none" strike="noStrike" dirty="0">
+                <a:solidFill>
+                  <a:srgbClr val="0066CC"/>
+                </a:solidFill>
+                <a:latin typeface="Noto Sans SC"/>
+                <a:ea typeface="Noto Sans SC"/>
+                <a:cs typeface="Noto Sans SC"/>
+                <a:sym typeface="Noto Sans SC"/>
+              </a:rPr>
+              <a:t> (Inference)</a:t>
+            </a:r>
+            <a:endParaRPr lang="en-US" sz="1100" dirty="0"/>
           </a:p>
         </p:txBody>
       </p:sp>
@@ -21710,44 +20603,6 @@
       </p:cxnSp>
       <p:sp>
         <p:nvSpPr>
-          <p:cNvPr id="11" name="AutoShape 11"/>
-          <p:cNvSpPr/>
-          <p:nvPr/>
-        </p:nvSpPr>
-        <p:spPr>
-          <a:xfrm>
-            <a:off x="6477000" y="2540000"/>
-            <a:ext cx="4889500" cy="889000"/>
-          </a:xfrm>
-          <a:prstGeom prst="roundRect">
-            <a:avLst>
-              <a:gd name="adj" fmla="val 0"/>
-            </a:avLst>
-          </a:prstGeom>
-          <a:solidFill>
-            <a:srgbClr val="FFFFFF">
-              <a:alpha val="5000"/>
-            </a:srgbClr>
-          </a:solidFill>
-          <a:ln w="25400" cap="flat" cmpd="sng">
-            <a:noFill/>
-            <a:prstDash val="solid"/>
-            <a:round/>
-          </a:ln>
-        </p:spPr>
-        <p:txBody>
-          <a:bodyPr vert="horz" wrap="square" lIns="63500" tIns="63500" rIns="63500" bIns="63500" rtlCol="0" anchor="ctr"/>
-          <a:lstStyle/>
-          <a:p>
-            <a:pPr algn="ctr">
-              <a:defRPr/>
-            </a:pPr>
-            <a:endParaRPr/>
-          </a:p>
-        </p:txBody>
-      </p:sp>
-      <p:sp>
-        <p:nvSpPr>
           <p:cNvPr id="12" name="AutoShape 12"/>
           <p:cNvSpPr/>
           <p:nvPr/>
@@ -21777,90 +20632,17 @@
               </a:lnSpc>
               <a:defRPr/>
             </a:pPr>
-            <a:r>
-              <a:rPr lang="en-US" sz="1400" b="1" i="0" u="none" strike="noStrike">
-                <a:solidFill>
-                  <a:srgbClr val="FFFFFF"/>
-                </a:solidFill>
-                <a:latin typeface="Noto Sans SC"/>
-                <a:ea typeface="Noto Sans SC"/>
-                <a:cs typeface="Noto Sans SC"/>
-                <a:sym typeface="Noto Sans SC"/>
-              </a:rPr>
-              <a:t>BlockID: block_12348 | Status:</a:t>
-            </a:r>
-            <a:r>
-              <a:rPr lang="en-US" sz="1400" b="1" i="0" u="none" strike="noStrike">
-                <a:solidFill>
-                  <a:srgbClr val="FF5757"/>
-                </a:solidFill>
-                <a:latin typeface="Noto Sans SC"/>
-                <a:ea typeface="Noto Sans SC"/>
-                <a:cs typeface="Noto Sans SC"/>
-                <a:sym typeface="Noto Sans SC"/>
-              </a:rPr>
-              <a:t>异常 (Anomaly)</a:t>
-            </a:r>
-            <a:endParaRPr lang="en-US" sz="1100"/>
-          </a:p>
-          <a:p>
-            <a:pPr marL="0" indent="0" algn="l">
-              <a:lnSpc>
-                <a:spcPct val="108333"/>
-              </a:lnSpc>
-            </a:pPr>
-            <a:r>
-              <a:rPr lang="en-US" sz="1200" b="0" i="0" u="none" strike="noStrike">
-                <a:solidFill>
-                  <a:srgbClr val="C8C8C8">
-                    <a:alpha val="80000"/>
-                  </a:srgbClr>
-                </a:solidFill>
-                <a:latin typeface="Noto Sans SC"/>
-                <a:ea typeface="Noto Sans SC"/>
-                <a:cs typeface="Noto Sans SC"/>
-                <a:sym typeface="Noto Sans SC"/>
-              </a:rPr>
-              <a:t>置信度 Confidence: 0.98 | 触发策略: 自动隔离流程 v2.1</a:t>
-            </a:r>
-          </a:p>
-        </p:txBody>
-      </p:sp>
-      <p:sp>
-        <p:nvSpPr>
-          <p:cNvPr id="13" name="AutoShape 13"/>
-          <p:cNvSpPr/>
-          <p:nvPr/>
-        </p:nvSpPr>
-        <p:spPr>
-          <a:xfrm>
-            <a:off x="6477000" y="3556000"/>
-            <a:ext cx="4889500" cy="889000"/>
-          </a:xfrm>
-          <a:prstGeom prst="roundRect">
-            <a:avLst>
-              <a:gd name="adj" fmla="val 0"/>
-            </a:avLst>
-          </a:prstGeom>
-          <a:solidFill>
-            <a:srgbClr val="FFFFFF">
-              <a:alpha val="5000"/>
-            </a:srgbClr>
-          </a:solidFill>
-          <a:ln w="25400" cap="flat" cmpd="sng">
-            <a:noFill/>
-            <a:prstDash val="solid"/>
-            <a:round/>
-          </a:ln>
-        </p:spPr>
-        <p:txBody>
-          <a:bodyPr vert="horz" wrap="square" lIns="63500" tIns="63500" rIns="63500" bIns="63500" rtlCol="0" anchor="ctr"/>
-          <a:lstStyle/>
-          <a:p>
-            <a:pPr algn="ctr">
-              <a:defRPr/>
-            </a:pPr>
-            <a:endParaRPr/>
+            <a:endParaRPr lang="en-US" sz="1200" b="0" i="0" u="none" strike="noStrike" dirty="0">
+              <a:solidFill>
+                <a:srgbClr val="C8C8C8">
+                  <a:alpha val="80000"/>
+                </a:srgbClr>
+              </a:solidFill>
+              <a:latin typeface="Noto Sans SC"/>
+              <a:ea typeface="Noto Sans SC"/>
+              <a:cs typeface="Noto Sans SC"/>
+              <a:sym typeface="Noto Sans SC"/>
+            </a:endParaRPr>
           </a:p>
         </p:txBody>
       </p:sp>
@@ -21895,52 +20677,17 @@
               </a:lnSpc>
               <a:defRPr/>
             </a:pPr>
-            <a:r>
-              <a:rPr lang="en-US" sz="1400" b="1" i="0" u="none" strike="noStrike">
-                <a:solidFill>
-                  <a:srgbClr val="FFFFFF"/>
-                </a:solidFill>
-                <a:latin typeface="Noto Sans SC"/>
-                <a:ea typeface="Noto Sans SC"/>
-                <a:cs typeface="Noto Sans SC"/>
-                <a:sym typeface="Noto Sans SC"/>
-              </a:rPr>
-              <a:t>BlockID: block_12347 | Status:</a:t>
-            </a:r>
-            <a:r>
-              <a:rPr lang="en-US" sz="1400" b="1" i="0" u="none" strike="noStrike">
-                <a:solidFill>
-                  <a:srgbClr val="FAAD14"/>
-                </a:solidFill>
-                <a:latin typeface="Noto Sans SC"/>
-                <a:ea typeface="Noto Sans SC"/>
-                <a:cs typeface="Noto Sans SC"/>
-                <a:sym typeface="Noto Sans SC"/>
-              </a:rPr>
-              <a:t>预警 (Warning)</a:t>
-            </a:r>
-            <a:endParaRPr lang="en-US" sz="1100"/>
-          </a:p>
-          <a:p>
-            <a:pPr marL="0" indent="0" algn="l">
-              <a:lnSpc>
-                <a:spcPct val="108333"/>
-              </a:lnSpc>
-            </a:pPr>
-            <a:r>
-              <a:rPr lang="en-US" sz="1200" b="0" i="0" u="none" strike="noStrike">
-                <a:solidFill>
-                  <a:srgbClr val="C8C8C8">
-                    <a:alpha val="80000"/>
-                  </a:srgbClr>
-                </a:solidFill>
-                <a:latin typeface="Noto Sans SC"/>
-                <a:ea typeface="Noto Sans SC"/>
-                <a:cs typeface="Noto Sans SC"/>
-                <a:sym typeface="Noto Sans SC"/>
-              </a:rPr>
-              <a:t>置信度 Confidence: 0.76 | 建议: 优先调度资源检查任务</a:t>
-            </a:r>
+            <a:endParaRPr lang="en-US" sz="1200" b="0" i="0" u="none" strike="noStrike" dirty="0">
+              <a:solidFill>
+                <a:srgbClr val="C8C8C8">
+                  <a:alpha val="80000"/>
+                </a:srgbClr>
+              </a:solidFill>
+              <a:latin typeface="Noto Sans SC"/>
+              <a:ea typeface="Noto Sans SC"/>
+              <a:cs typeface="Noto Sans SC"/>
+              <a:sym typeface="Noto Sans SC"/>
+            </a:endParaRPr>
           </a:p>
         </p:txBody>
       </p:sp>
@@ -21975,21 +20722,7 @@
               </a:lnSpc>
               <a:defRPr/>
             </a:pPr>
-            <a:r>
-              <a:rPr lang="en-US" sz="1200" b="0" i="0" u="none" strike="noStrike">
-                <a:solidFill>
-                  <a:srgbClr val="B4BEC8">
-                    <a:alpha val="70196"/>
-                  </a:srgbClr>
-                </a:solidFill>
-                <a:latin typeface="Noto Sans SC"/>
-                <a:ea typeface="Noto Sans SC"/>
-                <a:cs typeface="Noto Sans SC"/>
-                <a:sym typeface="Noto Sans SC"/>
-              </a:rPr>
-              <a:t>系统延迟: &lt; 10ms | 吞吐量: 12,500 events/sec | 模型版本: v3.4.1</a:t>
-            </a:r>
-            <a:endParaRPr lang="en-US" sz="1100"/>
+            <a:endParaRPr lang="en-US" sz="1100" dirty="0"/>
           </a:p>
         </p:txBody>
       </p:sp>
@@ -22132,7 +20865,7 @@
               <a:defRPr/>
             </a:pPr>
             <a:r>
-              <a:rPr lang="en-US" sz="1600" b="1" i="0" u="none" strike="noStrike">
+              <a:rPr lang="en-US" sz="1600" b="1" i="0" u="none" strike="noStrike" dirty="0" err="1">
                 <a:solidFill>
                   <a:srgbClr val="FFFFFF"/>
                 </a:solidFill>
@@ -22143,16 +20876,16 @@
               </a:rPr>
               <a:t>状态实时同步机制</a:t>
             </a:r>
-            <a:endParaRPr lang="en-US" sz="1100"/>
-          </a:p>
-          <a:p>
-            <a:pPr marL="0" indent="0" algn="l">
+            <a:endParaRPr lang="en-US" sz="1100" dirty="0"/>
+          </a:p>
+          <a:p>
+            <a:pPr>
               <a:lnSpc>
                 <a:spcPct val="108333"/>
               </a:lnSpc>
             </a:pPr>
             <a:r>
-              <a:rPr lang="en-US" sz="1300" b="0" i="0" u="none" strike="noStrike">
+              <a:rPr lang="en-US" sz="1300" dirty="0">
                 <a:solidFill>
                   <a:srgbClr val="E6E6E6">
                     <a:alpha val="80000"/>
@@ -22163,11 +20896,274 @@
                 <a:cs typeface="Noto Sans SC"/>
                 <a:sym typeface="Noto Sans SC"/>
               </a:rPr>
-              <a:t>异常数据已毫秒级同步至 Redis 缓存层，支持 Dashboard 前端实时拉取与其他监控 Agent 订阅查询。</a:t>
+              <a:t>MLP </a:t>
             </a:r>
-          </a:p>
-        </p:txBody>
-      </p:sp>
+            <a:r>
+              <a:rPr lang="zh-CN" altLang="en-US" sz="1300" dirty="0">
+                <a:solidFill>
+                  <a:srgbClr val="E6E6E6">
+                    <a:alpha val="80000"/>
+                  </a:srgbClr>
+                </a:solidFill>
+                <a:latin typeface="Noto Sans SC"/>
+                <a:ea typeface="Noto Sans SC"/>
+                <a:cs typeface="Noto Sans SC"/>
+                <a:sym typeface="Noto Sans SC"/>
+              </a:rPr>
+              <a:t>预测结果实时写入 </a:t>
+            </a:r>
+            <a:r>
+              <a:rPr lang="en-US" sz="1300" dirty="0" err="1">
+                <a:solidFill>
+                  <a:srgbClr val="E6E6E6">
+                    <a:alpha val="80000"/>
+                  </a:srgbClr>
+                </a:solidFill>
+                <a:latin typeface="Noto Sans SC"/>
+                <a:ea typeface="Noto Sans SC"/>
+                <a:cs typeface="Noto Sans SC"/>
+                <a:sym typeface="Noto Sans SC"/>
+              </a:rPr>
+              <a:t>ClickHouse</a:t>
+            </a:r>
+            <a:r>
+              <a:rPr lang="en-US" sz="1300" dirty="0">
+                <a:solidFill>
+                  <a:srgbClr val="E6E6E6">
+                    <a:alpha val="80000"/>
+                  </a:srgbClr>
+                </a:solidFill>
+                <a:latin typeface="Noto Sans SC"/>
+                <a:ea typeface="Noto Sans SC"/>
+                <a:cs typeface="Noto Sans SC"/>
+                <a:sym typeface="Noto Sans SC"/>
+              </a:rPr>
+              <a:t> </a:t>
+            </a:r>
+            <a:r>
+              <a:rPr lang="zh-CN" altLang="en-US" sz="1300" dirty="0">
+                <a:solidFill>
+                  <a:srgbClr val="E6E6E6">
+                    <a:alpha val="80000"/>
+                  </a:srgbClr>
+                </a:solidFill>
+                <a:latin typeface="Noto Sans SC"/>
+                <a:ea typeface="Noto Sans SC"/>
+                <a:cs typeface="Noto Sans SC"/>
+                <a:sym typeface="Noto Sans SC"/>
+              </a:rPr>
+              <a:t>异常表，并同步至 </a:t>
+            </a:r>
+            <a:r>
+              <a:rPr lang="en-US" sz="1300" dirty="0">
+                <a:solidFill>
+                  <a:srgbClr val="E6E6E6">
+                    <a:alpha val="80000"/>
+                  </a:srgbClr>
+                </a:solidFill>
+                <a:latin typeface="Noto Sans SC"/>
+                <a:ea typeface="Noto Sans SC"/>
+                <a:cs typeface="Noto Sans SC"/>
+                <a:sym typeface="Noto Sans SC"/>
+              </a:rPr>
+              <a:t>Redis </a:t>
+            </a:r>
+            <a:r>
+              <a:rPr lang="zh-CN" altLang="en-US" sz="1300" dirty="0">
+                <a:solidFill>
+                  <a:srgbClr val="E6E6E6">
+                    <a:alpha val="80000"/>
+                  </a:srgbClr>
+                </a:solidFill>
+                <a:latin typeface="Noto Sans SC"/>
+                <a:ea typeface="Noto Sans SC"/>
+                <a:cs typeface="Noto Sans SC"/>
+                <a:sym typeface="Noto Sans SC"/>
+              </a:rPr>
+              <a:t>缓存层（</a:t>
+            </a:r>
+            <a:r>
+              <a:rPr lang="en-US" sz="1300" dirty="0">
+                <a:solidFill>
+                  <a:srgbClr val="E6E6E6">
+                    <a:alpha val="80000"/>
+                  </a:srgbClr>
+                </a:solidFill>
+                <a:latin typeface="Noto Sans SC"/>
+                <a:ea typeface="Noto Sans SC"/>
+                <a:cs typeface="Noto Sans SC"/>
+                <a:sym typeface="Noto Sans SC"/>
+              </a:rPr>
+              <a:t>Sorted Set + Hash）。</a:t>
+            </a:r>
+          </a:p>
+          <a:p>
+            <a:pPr>
+              <a:lnSpc>
+                <a:spcPct val="108333"/>
+              </a:lnSpc>
+            </a:pPr>
+            <a:r>
+              <a:rPr lang="en-US" sz="1300" dirty="0">
+                <a:solidFill>
+                  <a:srgbClr val="E6E6E6">
+                    <a:alpha val="80000"/>
+                  </a:srgbClr>
+                </a:solidFill>
+                <a:latin typeface="Noto Sans SC"/>
+                <a:ea typeface="Noto Sans SC"/>
+                <a:cs typeface="Noto Sans SC"/>
+                <a:sym typeface="Noto Sans SC"/>
+              </a:rPr>
+              <a:t>Dashboard </a:t>
+            </a:r>
+            <a:r>
+              <a:rPr lang="zh-CN" altLang="en-US" sz="1300" dirty="0">
+                <a:solidFill>
+                  <a:srgbClr val="E6E6E6">
+                    <a:alpha val="80000"/>
+                  </a:srgbClr>
+                </a:solidFill>
+                <a:latin typeface="Noto Sans SC"/>
+                <a:ea typeface="Noto Sans SC"/>
+                <a:cs typeface="Noto Sans SC"/>
+                <a:sym typeface="Noto Sans SC"/>
+              </a:rPr>
+              <a:t>前端每 </a:t>
+            </a:r>
+            <a:r>
+              <a:rPr lang="en-US" altLang="zh-CN" sz="1300" dirty="0">
+                <a:solidFill>
+                  <a:srgbClr val="E6E6E6">
+                    <a:alpha val="80000"/>
+                  </a:srgbClr>
+                </a:solidFill>
+                <a:latin typeface="Noto Sans SC"/>
+                <a:ea typeface="Noto Sans SC"/>
+                <a:cs typeface="Noto Sans SC"/>
+                <a:sym typeface="Noto Sans SC"/>
+              </a:rPr>
+              <a:t>5 </a:t>
+            </a:r>
+            <a:r>
+              <a:rPr lang="zh-CN" altLang="en-US" sz="1300" dirty="0">
+                <a:solidFill>
+                  <a:srgbClr val="E6E6E6">
+                    <a:alpha val="80000"/>
+                  </a:srgbClr>
+                </a:solidFill>
+                <a:latin typeface="Noto Sans SC"/>
+                <a:ea typeface="Noto Sans SC"/>
+                <a:cs typeface="Noto Sans SC"/>
+                <a:sym typeface="Noto Sans SC"/>
+              </a:rPr>
+              <a:t>秒拉取 </a:t>
+            </a:r>
+            <a:r>
+              <a:rPr lang="en-US" sz="1300" dirty="0">
+                <a:solidFill>
+                  <a:srgbClr val="E6E6E6">
+                    <a:alpha val="80000"/>
+                  </a:srgbClr>
+                </a:solidFill>
+                <a:latin typeface="Noto Sans SC"/>
+                <a:ea typeface="Noto Sans SC"/>
+                <a:cs typeface="Noto Sans SC"/>
+                <a:sym typeface="Noto Sans SC"/>
+              </a:rPr>
+              <a:t>Top 10 </a:t>
+            </a:r>
+            <a:r>
+              <a:rPr lang="zh-CN" altLang="en-US" sz="1300" dirty="0">
+                <a:solidFill>
+                  <a:srgbClr val="E6E6E6">
+                    <a:alpha val="80000"/>
+                  </a:srgbClr>
+                </a:solidFill>
+                <a:latin typeface="Noto Sans SC"/>
+                <a:ea typeface="Noto Sans SC"/>
+                <a:cs typeface="Noto Sans SC"/>
+                <a:sym typeface="Noto Sans SC"/>
+              </a:rPr>
+              <a:t>异常数据，支持毫秒级查询响应。</a:t>
+            </a:r>
+            <a:r>
+              <a:rPr lang="en-US" sz="1300" b="0" i="0" u="none" strike="noStrike" dirty="0">
+                <a:solidFill>
+                  <a:srgbClr val="E6E6E6">
+                    <a:alpha val="80000"/>
+                  </a:srgbClr>
+                </a:solidFill>
+                <a:latin typeface="Noto Sans SC"/>
+                <a:ea typeface="Noto Sans SC"/>
+                <a:cs typeface="Noto Sans SC"/>
+                <a:sym typeface="Noto Sans SC"/>
+              </a:rPr>
+              <a:t>。</a:t>
+            </a:r>
+          </a:p>
+        </p:txBody>
+      </p:sp>
+      <p:pic>
+        <p:nvPicPr>
+          <p:cNvPr id="21" name="图片 20">
+            <a:extLst>
+              <a:ext uri="{FF2B5EF4-FFF2-40B4-BE49-F238E27FC236}">
+                <a16:creationId xmlns:a16="http://schemas.microsoft.com/office/drawing/2014/main" id="{3471866F-CB01-48B0-3AF1-B313DAFC8CE3}"/>
+              </a:ext>
+            </a:extLst>
+          </p:cNvPr>
+          <p:cNvPicPr>
+            <a:picLocks noChangeAspect="1"/>
+          </p:cNvPicPr>
+          <p:nvPr/>
+        </p:nvPicPr>
+        <p:blipFill>
+          <a:blip r:embed="rId6"/>
+          <a:stretch>
+            <a:fillRect/>
+          </a:stretch>
+        </p:blipFill>
+        <p:spPr>
+          <a:xfrm>
+            <a:off x="489146" y="2884136"/>
+            <a:ext cx="5511604" cy="1430284"/>
+          </a:xfrm>
+          <a:prstGeom prst="rect">
+            <a:avLst/>
+          </a:prstGeom>
+        </p:spPr>
+      </p:pic>
+      <p:pic>
+        <p:nvPicPr>
+          <p:cNvPr id="23" name="图片 22">
+            <a:extLst>
+              <a:ext uri="{FF2B5EF4-FFF2-40B4-BE49-F238E27FC236}">
+                <a16:creationId xmlns:a16="http://schemas.microsoft.com/office/drawing/2014/main" id="{9100AB07-C6A1-AD2D-5665-C19E639198CE}"/>
+              </a:ext>
+            </a:extLst>
+          </p:cNvPr>
+          <p:cNvPicPr>
+            <a:picLocks noChangeAspect="1"/>
+          </p:cNvPicPr>
+          <p:nvPr/>
+        </p:nvPicPr>
+        <p:blipFill>
+          <a:blip r:embed="rId7"/>
+          <a:stretch>
+            <a:fillRect/>
+          </a:stretch>
+        </p:blipFill>
+        <p:spPr>
+          <a:xfrm>
+            <a:off x="6343179" y="3048000"/>
+            <a:ext cx="5023321" cy="971600"/>
+          </a:xfrm>
+          <a:prstGeom prst="rect">
+            <a:avLst/>
+          </a:prstGeom>
+        </p:spPr>
+      </p:pic>
     </p:spTree>
   </p:cSld>
   <p:clrMapOvr>
